--- a/cursos/recursos/aperturas-y-defensas/03-defensa-francesa-estructura-de-peones-y-plan-tipico.pptx
+++ b/cursos/recursos/aperturas-y-defensas/03-defensa-francesa-estructura-de-peones-y-plan-tipico.pptx
@@ -1650,7 +1650,7 @@
                 <a:ea typeface="Calibri" pitchFamily="34" charset="-122"/>
                 <a:cs typeface="Calibri" pitchFamily="34" charset="-120"/>
               </a:rPr>
-              <a:t>El alfil de casillas claras de negras suele quedar encerrado detrás de su propia cadena de peones: aprender a activarlo (con ...b6 y ...Ba6, o cambiándolo a tiempo) es la clave estratégica de toda la apertura.</a:t>
+              <a:t>El alfil de casillas claras de negras suele quedar encerrado detrás de su propia cadena de peones: aprender a activarlo (con ...b6 y ...Aa6, o cambiándolo a tiempo) es la clave estratégica de toda la apertura.</a:t>
             </a:r>
             <a:endParaRPr lang="en-US" sz="1600" dirty="0"/>
           </a:p>
